--- a/skills/presentations/assets/pptx/examples/07-roadmap.pptx
+++ b/skills/presentations/assets/pptx/examples/07-roadmap.pptx
@@ -5,16 +5,16 @@
     <p:sldMasterId xmlns:r="http://schemas.openxmlformats.org/officeDocument/2006/relationships" id="2147483648" r:id="rId1"/>
   </p:sldMasterIdLst>
   <p:notesMasterIdLst>
-    <p:notesMasterId r:id="Rcd86c5771f4e4a9c"/>
+    <p:notesMasterId r:id="Ree392791eb3f4548"/>
   </p:notesMasterIdLst>
   <p:sldIdLst>
-    <p:sldId id="256" r:id="Rc2103f38e74a42f9"/>
-    <p:sldId id="257" r:id="Rb2087db39a884545"/>
-    <p:sldId id="258" r:id="R29d8db5884394fe5"/>
-    <p:sldId id="259" r:id="R0b8b89a0e7df4bff"/>
-    <p:sldId id="260" r:id="R74deda4b6061463b"/>
-    <p:sldId id="261" r:id="Re848a68025ee4ac7"/>
-    <p:sldId id="262" r:id="R44da3cc701354651"/>
+    <p:sldId id="256" r:id="Reaf84dc830b644de"/>
+    <p:sldId id="257" r:id="Ra946ea1977334f57"/>
+    <p:sldId id="258" r:id="R71e202454de94ede"/>
+    <p:sldId id="259" r:id="R05e35fe1bfdc4845"/>
+    <p:sldId id="260" r:id="R45d74c187e2d475b"/>
+    <p:sldId id="261" r:id="Rf15fe1c8ae584fa2"/>
+    <p:sldId id="262" r:id="R9b2e5f82d0ef48ac"/>
   </p:sldIdLst>
   <p:sldSz cx="12192000" cy="6858000"/>
   <p:notesSz cx="6858000" cy="9144000"/>
@@ -1575,7 +1575,7 @@
                 <a:latin typeface="Calibri"/>
                 <a:ea typeface="Calibri"/>
               </a:rPr>
-              <a:t>NOW (through June): sample checklist, USB3, cold-corner AON.</a:t>
+              <a:t>NOW (through June): sample checklist (ship 6/30), USB3, cold-corner AON.</a:t>
             </a:r>
           </a:p>
           <a:p xmlns:a="http://schemas.openxmlformats.org/drawingml/2006/main">
@@ -1624,6 +1624,18 @@
                 <a:ea typeface="Calibri"/>
               </a:rPr>
               <a:t>Gates: sample 6/30 · revB RTL target 9/15 · WiFi decision gate 8/01.</a:t>
+            </a:r>
+          </a:p>
+          <a:p xmlns:a="http://schemas.openxmlformats.org/drawingml/2006/main">
+            <a:r>
+              <a:rPr lang="en-US" sz="1600" b="0">
+                <a:solidFill>
+                  <a:srgbClr val="1A202C"/>
+                </a:solidFill>
+                <a:latin typeface="Calibri"/>
+                <a:ea typeface="Calibri"/>
+              </a:rPr>
+              <a:t>Already done earlier H1: AON B (3/20), freeze 4/10, TO 4/28, day-3 boot 5/15.</a:t>
             </a:r>
           </a:p>
         </p:txBody>

--- a/skills/presentations/assets/pptx/examples/07-roadmap.pptx
+++ b/skills/presentations/assets/pptx/examples/07-roadmap.pptx
@@ -5,16 +5,17 @@
     <p:sldMasterId xmlns:r="http://schemas.openxmlformats.org/officeDocument/2006/relationships" id="2147483648" r:id="rId1"/>
   </p:sldMasterIdLst>
   <p:notesMasterIdLst>
-    <p:notesMasterId r:id="Ree392791eb3f4548"/>
+    <p:notesMasterId r:id="Rb6f4da648de94536"/>
   </p:notesMasterIdLst>
   <p:sldIdLst>
-    <p:sldId id="256" r:id="Reaf84dc830b644de"/>
-    <p:sldId id="257" r:id="Ra946ea1977334f57"/>
-    <p:sldId id="258" r:id="R71e202454de94ede"/>
-    <p:sldId id="259" r:id="R05e35fe1bfdc4845"/>
-    <p:sldId id="260" r:id="R45d74c187e2d475b"/>
-    <p:sldId id="261" r:id="Rf15fe1c8ae584fa2"/>
-    <p:sldId id="262" r:id="R9b2e5f82d0ef48ac"/>
+    <p:sldId id="256" r:id="R440f5f35cd3c42a5"/>
+    <p:sldId id="257" r:id="R72e8d1844c644da7"/>
+    <p:sldId id="258" r:id="R507b470a60e04cd7"/>
+    <p:sldId id="259" r:id="R45a9dbe3f8c9482a"/>
+    <p:sldId id="260" r:id="R35a9f756ec334705"/>
+    <p:sldId id="261" r:id="Rb2e87db14ae7419c"/>
+    <p:sldId id="262" r:id="Re888220b8efe4432"/>
+    <p:sldId id="263" r:id="R6e2a7994989442e7"/>
   </p:sldIdLst>
   <p:sldSz cx="12192000" cy="6858000"/>
   <p:notesSz cx="6858000" cy="9144000"/>
@@ -480,6 +481,30 @@
               <a:t>Cover (example). H2 map with sample-first priority rule.</a:t>
             </a:r>
           </a:p>
+          <a:p xmlns:a="http://schemas.openxmlformats.org/drawingml/2006/main">
+            <a:r>
+              <a:rPr lang="en-US"/>
+              <a:t/>
+            </a:r>
+          </a:p>
+          <a:p xmlns:a="http://schemas.openxmlformats.org/drawingml/2006/main">
+            <a:r>
+              <a:rPr lang="en-US"/>
+              <a:t>Outcome themes + not-doing + capacity-honest plan</a:t>
+            </a:r>
+          </a:p>
+          <a:p xmlns:a="http://schemas.openxmlformats.org/drawingml/2006/main">
+            <a:r>
+              <a:rPr lang="en-US"/>
+              <a:t>EM Tools — Roadmap planning: https://www.em-tools.io/engineering-manager-responsibilities/roadmap-planning</a:t>
+            </a:r>
+          </a:p>
+          <a:p xmlns:a="http://schemas.openxmlformats.org/drawingml/2006/main">
+            <a:r>
+              <a:rPr lang="en-US"/>
+              <a:t>StaffEng — engineering strategy: https://staffeng.com/guides/engineering-strategy/</a:t>
+            </a:r>
+          </a:p>
         </p:txBody>
       </p:sp>
     </p:spTree>
@@ -532,7 +557,19 @@
           <a:p xmlns:a="http://schemas.openxmlformats.org/drawingml/2006/main">
             <a:r>
               <a:rPr lang="en-US"/>
-              <a:t>Endorsed map, not wishlist.</a:t>
+              <a:t>Outcome themes + not-doing + capacity-honest plan</a:t>
+            </a:r>
+          </a:p>
+          <a:p xmlns:a="http://schemas.openxmlformats.org/drawingml/2006/main">
+            <a:r>
+              <a:rPr lang="en-US"/>
+              <a:t>EM Tools — Roadmap planning: https://www.em-tools.io/engineering-manager-responsibilities/roadmap-planning</a:t>
+            </a:r>
+          </a:p>
+          <a:p xmlns:a="http://schemas.openxmlformats.org/drawingml/2006/main">
+            <a:r>
+              <a:rPr lang="en-US"/>
+              <a:t>StaffEng — engineering strategy: https://staffeng.com/guides/engineering-strategy/</a:t>
             </a:r>
           </a:p>
         </p:txBody>
@@ -587,7 +624,7 @@
           <a:p xmlns:a="http://schemas.openxmlformats.org/drawingml/2006/main">
             <a:r>
               <a:rPr lang="en-US"/>
-              <a:t>Time-ordered themes.</a:t>
+              <a:t>Endorsed map, not wishlist.</a:t>
             </a:r>
           </a:p>
         </p:txBody>
@@ -642,7 +679,7 @@
           <a:p xmlns:a="http://schemas.openxmlformats.org/drawingml/2006/main">
             <a:r>
               <a:rPr lang="en-US"/>
-              <a:t>A only; HC already requested.</a:t>
+              <a:t>Time-ordered themes.</a:t>
             </a:r>
           </a:p>
         </p:txBody>
@@ -697,7 +734,7 @@
           <a:p xmlns:a="http://schemas.openxmlformats.org/drawingml/2006/main">
             <a:r>
               <a:rPr lang="en-US"/>
-              <a:t>Protect the map.</a:t>
+              <a:t>A only; HC already requested.</a:t>
             </a:r>
           </a:p>
         </p:txBody>
@@ -752,7 +789,7 @@
           <a:p xmlns:a="http://schemas.openxmlformats.org/drawingml/2006/main">
             <a:r>
               <a:rPr lang="en-US"/>
-              <a:t>Walk trade-offs; land recommendation.</a:t>
+              <a:t>Protect the map.</a:t>
             </a:r>
           </a:p>
         </p:txBody>
@@ -766,6 +803,61 @@
 </file>
 
 <file path=ppt/notesSlides/notesSlide7.xml><?xml version="1.0" encoding="utf-8"?>
+<p:notes xmlns:p="http://schemas.openxmlformats.org/presentationml/2006/main">
+  <p:cSld>
+    <p:spTree>
+      <p:nvGrpSpPr>
+        <p:cNvPr id="1" name=""/>
+        <p:cNvGrpSpPr/>
+        <p:nvPr/>
+      </p:nvGrpSpPr>
+      <p:grpSpPr>
+        <a:xfrm xmlns:a="http://schemas.openxmlformats.org/drawingml/2006/main"/>
+      </p:grpSpPr>
+      <p:sp>
+        <p:nvSpPr>
+          <p:cNvPr id="2" name="Slide Image Placeholder 1"/>
+          <p:cNvSpPr/>
+          <p:nvPr>
+            <p:ph type="sldImg" idx="0"/>
+          </p:nvPr>
+        </p:nvSpPr>
+        <p:spPr/>
+        <p:txBody>
+          <a:bodyPr xmlns:a="http://schemas.openxmlformats.org/drawingml/2006/main"/>
+          <a:lstStyle xmlns:a="http://schemas.openxmlformats.org/drawingml/2006/main"/>
+          <a:p xmlns:a="http://schemas.openxmlformats.org/drawingml/2006/main"/>
+        </p:txBody>
+      </p:sp>
+      <p:sp>
+        <p:nvSpPr>
+          <p:cNvPr id="3" name="Notes Placeholder 2"/>
+          <p:cNvSpPr/>
+          <p:nvPr>
+            <p:ph type="body" idx="1"/>
+          </p:nvPr>
+        </p:nvSpPr>
+        <p:spPr/>
+        <p:txBody>
+          <a:bodyPr xmlns:a="http://schemas.openxmlformats.org/drawingml/2006/main"/>
+          <a:lstStyle xmlns:a="http://schemas.openxmlformats.org/drawingml/2006/main"/>
+          <a:p xmlns:a="http://schemas.openxmlformats.org/drawingml/2006/main">
+            <a:r>
+              <a:rPr lang="en-US"/>
+              <a:t>Walk trade-offs; land recommendation.</a:t>
+            </a:r>
+          </a:p>
+        </p:txBody>
+      </p:sp>
+    </p:spTree>
+  </p:cSld>
+  <p:clrMapOvr>
+    <a:masterClrMapping xmlns:a="http://schemas.openxmlformats.org/drawingml/2006/main"/>
+  </p:clrMapOvr>
+</p:notes>
+</file>
+
+<file path=ppt/notesSlides/notesSlide8.xml><?xml version="1.0" encoding="utf-8"?>
 <p:notes xmlns:p="http://schemas.openxmlformats.org/presentationml/2006/main">
   <p:cSld>
     <p:spTree>
@@ -1135,8 +1227,8 @@
         </p:nvSpPr>
         <p:spPr>
           <a:xfrm xmlns:a="http://schemas.openxmlformats.org/drawingml/2006/main">
-            <a:off x="504000" y="1008000"/>
-            <a:ext cx="11088000" cy="324000"/>
+            <a:off x="504000" y="936000"/>
+            <a:ext cx="11088000" cy="306000"/>
           </a:xfrm>
           <a:prstGeom xmlns:a="http://schemas.openxmlformats.org/drawingml/2006/main" prst="rect">
             <a:avLst/>
@@ -1167,8 +1259,8 @@
         </p:nvSpPr>
         <p:spPr>
           <a:xfrm xmlns:a="http://schemas.openxmlformats.org/drawingml/2006/main">
-            <a:off x="504000" y="1440000"/>
-            <a:ext cx="11088000" cy="936000"/>
+            <a:off x="504000" y="1332000"/>
+            <a:ext cx="11088000" cy="900000"/>
           </a:xfrm>
           <a:prstGeom xmlns:a="http://schemas.openxmlformats.org/drawingml/2006/main" prst="rect">
             <a:avLst/>
@@ -1179,7 +1271,7 @@
           <a:lstStyle xmlns:a="http://schemas.openxmlformats.org/drawingml/2006/main"/>
           <a:p xmlns:a="http://schemas.openxmlformats.org/drawingml/2006/main">
             <a:r>
-              <a:rPr lang="en-US" sz="3400" b="1">
+              <a:rPr lang="en-US" sz="3200" b="1">
                 <a:solidFill>
                   <a:srgbClr val="FFFFFF"/>
                 </a:solidFill>
@@ -1199,8 +1291,8 @@
         </p:nvSpPr>
         <p:spPr>
           <a:xfrm xmlns:a="http://schemas.openxmlformats.org/drawingml/2006/main">
-            <a:off x="504000" y="2520000"/>
-            <a:ext cx="11088000" cy="720000"/>
+            <a:off x="504000" y="2340000"/>
+            <a:ext cx="11088000" cy="648000"/>
           </a:xfrm>
           <a:prstGeom xmlns:a="http://schemas.openxmlformats.org/drawingml/2006/main" prst="rect">
             <a:avLst/>
@@ -1211,7 +1303,7 @@
           <a:lstStyle xmlns:a="http://schemas.openxmlformats.org/drawingml/2006/main"/>
           <a:p xmlns:a="http://schemas.openxmlformats.org/drawingml/2006/main">
             <a:r>
-              <a:rPr lang="en-US" sz="1700" b="0">
+              <a:rPr lang="en-US" sz="1600" b="0">
                 <a:solidFill>
                   <a:srgbClr val="CADCFC"/>
                 </a:solidFill>
@@ -1226,6 +1318,38 @@
       <p:sp>
         <p:nvSpPr>
           <p:cNvPr id="100003" name="TextBox 4"/>
+          <p:cNvSpPr txBox="1"/>
+          <p:nvPr/>
+        </p:nvSpPr>
+        <p:spPr>
+          <a:xfrm xmlns:a="http://schemas.openxmlformats.org/drawingml/2006/main">
+            <a:off x="504000" y="3240000"/>
+            <a:ext cx="11088000" cy="576000"/>
+          </a:xfrm>
+          <a:prstGeom xmlns:a="http://schemas.openxmlformats.org/drawingml/2006/main" prst="rect">
+            <a:avLst/>
+          </a:prstGeom>
+        </p:spPr>
+        <p:txBody>
+          <a:bodyPr xmlns:a="http://schemas.openxmlformats.org/drawingml/2006/main"/>
+          <a:lstStyle xmlns:a="http://schemas.openxmlformats.org/drawingml/2006/main"/>
+          <a:p xmlns:a="http://schemas.openxmlformats.org/drawingml/2006/main">
+            <a:r>
+              <a:rPr lang="en-US" sz="1400" b="0">
+                <a:solidFill>
+                  <a:srgbClr val="A0C4E8"/>
+                </a:solidFill>
+                <a:latin typeface="Calibri"/>
+                <a:ea typeface="Calibri"/>
+              </a:rPr>
+              <a:t>Pattern: Outcome themes + not-doing + capacity-honest plan</a:t>
+            </a:r>
+          </a:p>
+        </p:txBody>
+      </p:sp>
+      <p:sp>
+        <p:nvSpPr>
+          <p:cNvPr id="100004" name="TextBox 5"/>
           <p:cNvSpPr txBox="1"/>
           <p:nvPr/>
         </p:nvSpPr>
@@ -1261,6 +1385,279 @@
 </file>
 
 <file path=ppt/slides/slide2.xml><?xml version="1.0" encoding="utf-8"?>
+<p:sld xmlns:p="http://schemas.openxmlformats.org/presentationml/2006/main">
+  <p:cSld name="Pattern provenance">
+    <p:bg>
+      <p:bgPr>
+        <a:solidFill xmlns:a="http://schemas.openxmlformats.org/drawingml/2006/main">
+          <a:srgbClr val="F4F7FC"/>
+        </a:solidFill>
+      </p:bgPr>
+    </p:bg>
+    <p:spTree>
+      <p:nvGrpSpPr>
+        <p:cNvPr id="1" name=""/>
+        <p:cNvGrpSpPr/>
+        <p:nvPr/>
+      </p:nvGrpSpPr>
+      <p:grpSpPr/>
+      <p:sp>
+        <p:nvSpPr>
+          <p:cNvPr id="100005" name="TextBox 1"/>
+          <p:cNvSpPr txBox="1"/>
+          <p:nvPr/>
+        </p:nvSpPr>
+        <p:spPr>
+          <a:xfrm xmlns:a="http://schemas.openxmlformats.org/drawingml/2006/main">
+            <a:off x="504000" y="270000"/>
+            <a:ext cx="11088000" cy="270000"/>
+          </a:xfrm>
+          <a:prstGeom xmlns:a="http://schemas.openxmlformats.org/drawingml/2006/main" prst="rect">
+            <a:avLst/>
+          </a:prstGeom>
+        </p:spPr>
+        <p:txBody>
+          <a:bodyPr xmlns:a="http://schemas.openxmlformats.org/drawingml/2006/main"/>
+          <a:lstStyle xmlns:a="http://schemas.openxmlformats.org/drawingml/2006/main"/>
+          <a:p xmlns:a="http://schemas.openxmlformats.org/drawingml/2006/main">
+            <a:r>
+              <a:rPr lang="en-US" sz="1100" b="1">
+                <a:solidFill>
+                  <a:srgbClr val="2B6CB0"/>
+                </a:solidFill>
+                <a:latin typeface="Calibri"/>
+                <a:ea typeface="Calibri"/>
+              </a:rPr>
+              <a:t>WHERE THIS DECK SHAPE COMES FROM</a:t>
+            </a:r>
+          </a:p>
+        </p:txBody>
+      </p:sp>
+      <p:sp>
+        <p:nvSpPr>
+          <p:cNvPr id="100006" name="TextBox 2"/>
+          <p:cNvSpPr txBox="1"/>
+          <p:nvPr/>
+        </p:nvSpPr>
+        <p:spPr>
+          <a:xfrm xmlns:a="http://schemas.openxmlformats.org/drawingml/2006/main">
+            <a:off x="504000" y="558000"/>
+            <a:ext cx="11088000" cy="612000"/>
+          </a:xfrm>
+          <a:prstGeom xmlns:a="http://schemas.openxmlformats.org/drawingml/2006/main" prst="rect">
+            <a:avLst/>
+          </a:prstGeom>
+        </p:spPr>
+        <p:txBody>
+          <a:bodyPr xmlns:a="http://schemas.openxmlformats.org/drawingml/2006/main"/>
+          <a:lstStyle xmlns:a="http://schemas.openxmlformats.org/drawingml/2006/main"/>
+          <a:p xmlns:a="http://schemas.openxmlformats.org/drawingml/2006/main">
+            <a:r>
+              <a:rPr lang="en-US" sz="2800" b="1">
+                <a:solidFill>
+                  <a:srgbClr val="1A202C"/>
+                </a:solidFill>
+                <a:latin typeface="Calibri"/>
+                <a:ea typeface="Calibri"/>
+              </a:rPr>
+              <a:t>Pattern provenance</a:t>
+            </a:r>
+          </a:p>
+        </p:txBody>
+      </p:sp>
+      <p:sp>
+        <p:nvSpPr>
+          <p:cNvPr id="100007" name="TextBox 3"/>
+          <p:cNvSpPr txBox="1"/>
+          <p:nvPr/>
+        </p:nvSpPr>
+        <p:spPr>
+          <a:xfrm xmlns:a="http://schemas.openxmlformats.org/drawingml/2006/main">
+            <a:off x="504000" y="1260000"/>
+            <a:ext cx="11088000" cy="4860000"/>
+          </a:xfrm>
+          <a:prstGeom xmlns:a="http://schemas.openxmlformats.org/drawingml/2006/main" prst="rect">
+            <a:avLst/>
+          </a:prstGeom>
+          <a:solidFill xmlns:a="http://schemas.openxmlformats.org/drawingml/2006/main">
+            <a:srgbClr val="FFFFFF"/>
+          </a:solidFill>
+        </p:spPr>
+        <p:txBody>
+          <a:bodyPr xmlns:a="http://schemas.openxmlformats.org/drawingml/2006/main"/>
+          <a:lstStyle xmlns:a="http://schemas.openxmlformats.org/drawingml/2006/main"/>
+          <a:p xmlns:a="http://schemas.openxmlformats.org/drawingml/2006/main">
+            <a:r>
+              <a:rPr lang="en-US" sz="1500" b="0">
+                <a:solidFill>
+                  <a:srgbClr val="1A202C"/>
+                </a:solidFill>
+                <a:latin typeface="Calibri"/>
+                <a:ea typeface="Calibri"/>
+              </a:rPr>
+              <a:t>Public pattern (structure only — not a confidential company deck):</a:t>
+            </a:r>
+          </a:p>
+          <a:p xmlns:a="http://schemas.openxmlformats.org/drawingml/2006/main">
+            <a:r>
+              <a:rPr lang="en-US" sz="1500" b="0">
+                <a:solidFill>
+                  <a:srgbClr val="1A202C"/>
+                </a:solidFill>
+                <a:latin typeface="Calibri"/>
+                <a:ea typeface="Calibri"/>
+              </a:rPr>
+              <a:t/>
+            </a:r>
+          </a:p>
+          <a:p xmlns:a="http://schemas.openxmlformats.org/drawingml/2006/main">
+            <a:r>
+              <a:rPr lang="en-US" sz="1500" b="0">
+                <a:solidFill>
+                  <a:srgbClr val="1A202C"/>
+                </a:solidFill>
+                <a:latin typeface="Calibri"/>
+                <a:ea typeface="Calibri"/>
+              </a:rPr>
+              <a:t>Outcome themes + not-doing + capacity-honest plan</a:t>
+            </a:r>
+          </a:p>
+          <a:p xmlns:a="http://schemas.openxmlformats.org/drawingml/2006/main">
+            <a:r>
+              <a:rPr lang="en-US" sz="1500" b="0">
+                <a:solidFill>
+                  <a:srgbClr val="1A202C"/>
+                </a:solidFill>
+                <a:latin typeface="Calibri"/>
+                <a:ea typeface="Calibri"/>
+              </a:rPr>
+              <a:t/>
+            </a:r>
+          </a:p>
+          <a:p xmlns:a="http://schemas.openxmlformats.org/drawingml/2006/main">
+            <a:r>
+              <a:rPr lang="en-US" sz="1500" b="0">
+                <a:solidFill>
+                  <a:srgbClr val="1A202C"/>
+                </a:solidFill>
+                <a:latin typeface="Calibri"/>
+                <a:ea typeface="Calibri"/>
+              </a:rPr>
+              <a:t>• EM Tools — Roadmap planning</a:t>
+            </a:r>
+          </a:p>
+          <a:p xmlns:a="http://schemas.openxmlformats.org/drawingml/2006/main">
+            <a:r>
+              <a:rPr lang="en-US" sz="1500" b="0">
+                <a:solidFill>
+                  <a:srgbClr val="1A202C"/>
+                </a:solidFill>
+                <a:latin typeface="Calibri"/>
+                <a:ea typeface="Calibri"/>
+              </a:rPr>
+              <a:t>  https://www.em-tools.io/engineering-manager-responsibilities/roadmap-planning</a:t>
+            </a:r>
+          </a:p>
+          <a:p xmlns:a="http://schemas.openxmlformats.org/drawingml/2006/main">
+            <a:r>
+              <a:rPr lang="en-US" sz="1500" b="0">
+                <a:solidFill>
+                  <a:srgbClr val="1A202C"/>
+                </a:solidFill>
+                <a:latin typeface="Calibri"/>
+                <a:ea typeface="Calibri"/>
+              </a:rPr>
+              <a:t>• StaffEng — engineering strategy</a:t>
+            </a:r>
+          </a:p>
+          <a:p xmlns:a="http://schemas.openxmlformats.org/drawingml/2006/main">
+            <a:r>
+              <a:rPr lang="en-US" sz="1500" b="0">
+                <a:solidFill>
+                  <a:srgbClr val="1A202C"/>
+                </a:solidFill>
+                <a:latin typeface="Calibri"/>
+                <a:ea typeface="Calibri"/>
+              </a:rPr>
+              <a:t>  https://staffeng.com/guides/engineering-strategy/</a:t>
+            </a:r>
+          </a:p>
+          <a:p xmlns:a="http://schemas.openxmlformats.org/drawingml/2006/main">
+            <a:r>
+              <a:rPr lang="en-US" sz="1500" b="0">
+                <a:solidFill>
+                  <a:srgbClr val="1A202C"/>
+                </a:solidFill>
+                <a:latin typeface="Calibri"/>
+                <a:ea typeface="Calibri"/>
+              </a:rPr>
+              <a:t/>
+            </a:r>
+          </a:p>
+          <a:p xmlns:a="http://schemas.openxmlformats.org/drawingml/2006/main">
+            <a:r>
+              <a:rPr lang="en-US" sz="1500" b="0">
+                <a:solidFill>
+                  <a:srgbClr val="1A202C"/>
+                </a:solidFill>
+                <a:latin typeface="Calibri"/>
+                <a:ea typeface="Calibri"/>
+              </a:rPr>
+              <a:t>How to use: copy section order and decision verbs; replace with your metrics.</a:t>
+            </a:r>
+          </a:p>
+          <a:p xmlns:a="http://schemas.openxmlformats.org/drawingml/2006/main">
+            <a:r>
+              <a:rPr lang="en-US" sz="1500" b="0">
+                <a:solidFill>
+                  <a:srgbClr val="1A202C"/>
+                </a:solidFill>
+                <a:latin typeface="Calibri"/>
+                <a:ea typeface="Calibri"/>
+              </a:rPr>
+              <a:t>In-repo: skills/presentations/classic-public-cases.md</a:t>
+            </a:r>
+          </a:p>
+        </p:txBody>
+      </p:sp>
+      <p:sp>
+        <p:nvSpPr>
+          <p:cNvPr id="100008" name="TextBox 4"/>
+          <p:cNvSpPr txBox="1"/>
+          <p:nvPr/>
+        </p:nvSpPr>
+        <p:spPr>
+          <a:xfrm xmlns:a="http://schemas.openxmlformats.org/drawingml/2006/main">
+            <a:off x="504000" y="6426000"/>
+            <a:ext cx="11088000" cy="306000"/>
+          </a:xfrm>
+          <a:prstGeom xmlns:a="http://schemas.openxmlformats.org/drawingml/2006/main" prst="rect">
+            <a:avLst/>
+          </a:prstGeom>
+        </p:spPr>
+        <p:txBody>
+          <a:bodyPr xmlns:a="http://schemas.openxmlformats.org/drawingml/2006/main"/>
+          <a:lstStyle xmlns:a="http://schemas.openxmlformats.org/drawingml/2006/main"/>
+          <a:p xmlns:a="http://schemas.openxmlformats.org/drawingml/2006/main">
+            <a:r>
+              <a:rPr lang="en-US" sz="1100" b="0">
+                <a:solidFill>
+                  <a:srgbClr val="718096"/>
+                </a:solidFill>
+                <a:latin typeface="Calibri"/>
+                <a:ea typeface="Calibri"/>
+              </a:rPr>
+              <a:t>Atlas Platform  ·  Project Aurora  ·  NovaSemi  ·  2026</a:t>
+            </a:r>
+          </a:p>
+        </p:txBody>
+      </p:sp>
+    </p:spTree>
+  </p:cSld>
+</p:sld>
+</file>
+
+<file path=ppt/slides/slide3.xml><?xml version="1.0" encoding="utf-8"?>
 <p:sld xmlns:p="http://schemas.openxmlformats.org/presentationml/2006/main">
   <p:cSld name="BLUF — endorse H2 themes; pick sample vs WiFi priority">
     <p:bg>
@@ -1279,7 +1676,7 @@
       <p:grpSpPr/>
       <p:sp>
         <p:nvSpPr>
-          <p:cNvPr id="100004" name="TextBox 1"/>
+          <p:cNvPr id="100009" name="TextBox 1"/>
           <p:cNvSpPr txBox="1"/>
           <p:nvPr/>
         </p:nvSpPr>
@@ -1311,7 +1708,7 @@
       </p:sp>
       <p:sp>
         <p:nvSpPr>
-          <p:cNvPr id="100005" name="TextBox 2"/>
+          <p:cNvPr id="100010" name="TextBox 2"/>
           <p:cNvSpPr txBox="1"/>
           <p:nvPr/>
         </p:nvSpPr>
@@ -1343,7 +1740,7 @@
       </p:sp>
       <p:sp>
         <p:nvSpPr>
-          <p:cNvPr id="100006" name="TextBox 3"/>
+          <p:cNvPr id="100011" name="TextBox 3"/>
           <p:cNvSpPr txBox="1"/>
           <p:nvPr/>
         </p:nvSpPr>
@@ -1378,7 +1775,7 @@
       </p:sp>
       <p:sp>
         <p:nvSpPr>
-          <p:cNvPr id="100007" name="TextBox 4"/>
+          <p:cNvPr id="100012" name="TextBox 4"/>
           <p:cNvSpPr txBox="1"/>
           <p:nvPr/>
         </p:nvSpPr>
@@ -1461,7 +1858,7 @@
       </p:sp>
       <p:sp>
         <p:nvSpPr>
-          <p:cNvPr id="100008" name="TextBox 5"/>
+          <p:cNvPr id="100013" name="TextBox 5"/>
           <p:cNvSpPr txBox="1"/>
           <p:nvPr/>
         </p:nvSpPr>
@@ -1496,7 +1893,7 @@
 </p:sld>
 </file>
 
-<file path=ppt/slides/slide3.xml><?xml version="1.0" encoding="utf-8"?>
+<file path=ppt/slides/slide4.xml><?xml version="1.0" encoding="utf-8"?>
 <p:sld xmlns:p="http://schemas.openxmlformats.org/presentationml/2006/main">
   <p:cSld name="Now / Next / Later">
     <p:bg>
@@ -1515,7 +1912,7 @@
       <p:grpSpPr/>
       <p:sp>
         <p:nvSpPr>
-          <p:cNvPr id="100009" name="TextBox 1"/>
+          <p:cNvPr id="100014" name="TextBox 1"/>
           <p:cNvSpPr txBox="1"/>
           <p:nvPr/>
         </p:nvSpPr>
@@ -1547,7 +1944,7 @@
       </p:sp>
       <p:sp>
         <p:nvSpPr>
-          <p:cNvPr id="100010" name="TextBox 2"/>
+          <p:cNvPr id="100015" name="TextBox 2"/>
           <p:cNvSpPr txBox="1"/>
           <p:nvPr/>
         </p:nvSpPr>
@@ -1642,7 +2039,7 @@
       </p:sp>
       <p:sp>
         <p:nvSpPr>
-          <p:cNvPr id="100011" name="TextBox 3"/>
+          <p:cNvPr id="100016" name="TextBox 3"/>
           <p:cNvSpPr txBox="1"/>
           <p:nvPr/>
         </p:nvSpPr>
@@ -1677,7 +2074,7 @@
 </p:sld>
 </file>
 
-<file path=ppt/slides/slide4.xml><?xml version="1.0" encoding="utf-8"?>
+<file path=ppt/slides/slide5.xml><?xml version="1.0" encoding="utf-8"?>
 <p:sld xmlns:p="http://schemas.openxmlformats.org/presentationml/2006/main">
   <p:cSld name="Capacity &amp; assumptions (A)">
     <p:bg>
@@ -1696,7 +2093,7 @@
       <p:grpSpPr/>
       <p:sp>
         <p:nvSpPr>
-          <p:cNvPr id="100012" name="TextBox 1"/>
+          <p:cNvPr id="100017" name="TextBox 1"/>
           <p:cNvSpPr txBox="1"/>
           <p:nvPr/>
         </p:nvSpPr>
@@ -1728,7 +2125,7 @@
       </p:sp>
       <p:sp>
         <p:nvSpPr>
-          <p:cNvPr id="100013" name="TextBox 2"/>
+          <p:cNvPr id="100018" name="TextBox 2"/>
           <p:cNvSpPr txBox="1"/>
           <p:nvPr/>
         </p:nvSpPr>
@@ -1823,7 +2220,7 @@
       </p:sp>
       <p:sp>
         <p:nvSpPr>
-          <p:cNvPr id="100014" name="TextBox 3"/>
+          <p:cNvPr id="100019" name="TextBox 3"/>
           <p:cNvSpPr txBox="1"/>
           <p:nvPr/>
         </p:nvSpPr>
@@ -1858,7 +2255,7 @@
 </p:sld>
 </file>
 
-<file path=ppt/slides/slide5.xml><?xml version="1.0" encoding="utf-8"?>
+<file path=ppt/slides/slide6.xml><?xml version="1.0" encoding="utf-8"?>
 <p:sld xmlns:p="http://schemas.openxmlformats.org/presentationml/2006/main">
   <p:cSld name="Intake rule">
     <p:bg>
@@ -1877,7 +2274,7 @@
       <p:grpSpPr/>
       <p:sp>
         <p:nvSpPr>
-          <p:cNvPr id="100015" name="TextBox 1"/>
+          <p:cNvPr id="100020" name="TextBox 1"/>
           <p:cNvSpPr txBox="1"/>
           <p:nvPr/>
         </p:nvSpPr>
@@ -1909,7 +2306,7 @@
       </p:sp>
       <p:sp>
         <p:nvSpPr>
-          <p:cNvPr id="100016" name="TextBox 2"/>
+          <p:cNvPr id="100021" name="TextBox 2"/>
           <p:cNvSpPr txBox="1"/>
           <p:nvPr/>
         </p:nvSpPr>
@@ -1980,7 +2377,7 @@
       </p:sp>
       <p:sp>
         <p:nvSpPr>
-          <p:cNvPr id="100017" name="TextBox 3"/>
+          <p:cNvPr id="100022" name="TextBox 3"/>
           <p:cNvSpPr txBox="1"/>
           <p:nvPr/>
         </p:nvSpPr>
@@ -2015,7 +2412,7 @@
 </p:sld>
 </file>
 
-<file path=ppt/slides/slide6.xml><?xml version="1.0" encoding="utf-8"?>
+<file path=ppt/slides/slide7.xml><?xml version="1.0" encoding="utf-8"?>
 <p:sld xmlns:p="http://schemas.openxmlformats.org/presentationml/2006/main">
   <p:cSld name="Options &amp; recommendation">
     <p:bg>
@@ -2034,7 +2431,7 @@
       <p:grpSpPr/>
       <p:sp>
         <p:nvSpPr>
-          <p:cNvPr id="100018" name="TextBox 1"/>
+          <p:cNvPr id="100023" name="TextBox 1"/>
           <p:cNvSpPr txBox="1"/>
           <p:nvPr/>
         </p:nvSpPr>
@@ -2066,7 +2463,7 @@
       </p:sp>
       <p:sp>
         <p:nvSpPr>
-          <p:cNvPr id="100019" name="TextBox 2"/>
+          <p:cNvPr id="100024" name="TextBox 2"/>
           <p:cNvSpPr txBox="1"/>
           <p:nvPr/>
         </p:nvSpPr>
@@ -2098,7 +2495,7 @@
       </p:sp>
       <p:graphicFrame>
         <p:nvGraphicFramePr>
-          <p:cNvPr id="100020" name="Table 1"/>
+          <p:cNvPr id="100025" name="Table 1"/>
           <p:cNvGraphicFramePr/>
           <p:nvPr/>
         </p:nvGraphicFramePr>
@@ -2404,7 +2801,7 @@
       </p:graphicFrame>
       <p:sp>
         <p:nvSpPr>
-          <p:cNvPr id="100021" name="TextBox 3"/>
+          <p:cNvPr id="100026" name="TextBox 3"/>
           <p:cNvSpPr txBox="1"/>
           <p:nvPr/>
         </p:nvSpPr>
@@ -2439,7 +2836,7 @@
 </p:sld>
 </file>
 
-<file path=ppt/slides/slide7.xml><?xml version="1.0" encoding="utf-8"?>
+<file path=ppt/slides/slide8.xml><?xml version="1.0" encoding="utf-8"?>
 <p:sld xmlns:p="http://schemas.openxmlformats.org/presentationml/2006/main">
   <p:cSld name="Decision &amp; ask">
     <p:bg>
@@ -2458,7 +2855,7 @@
       <p:grpSpPr/>
       <p:sp>
         <p:nvSpPr>
-          <p:cNvPr id="100022" name="TextBox 1"/>
+          <p:cNvPr id="100027" name="TextBox 1"/>
           <p:cNvSpPr txBox="1"/>
           <p:nvPr/>
         </p:nvSpPr>
@@ -2490,7 +2887,7 @@
       </p:sp>
       <p:sp>
         <p:nvSpPr>
-          <p:cNvPr id="100023" name="TextBox 2"/>
+          <p:cNvPr id="100028" name="TextBox 2"/>
           <p:cNvSpPr txBox="1"/>
           <p:nvPr/>
         </p:nvSpPr>
@@ -2522,7 +2919,7 @@
       </p:sp>
       <p:sp>
         <p:nvSpPr>
-          <p:cNvPr id="100024" name="TextBox 3"/>
+          <p:cNvPr id="100029" name="TextBox 3"/>
           <p:cNvSpPr txBox="1"/>
           <p:nvPr/>
         </p:nvSpPr>
@@ -2581,7 +2978,7 @@
       </p:sp>
       <p:sp>
         <p:nvSpPr>
-          <p:cNvPr id="100025" name="TextBox 4"/>
+          <p:cNvPr id="100030" name="TextBox 4"/>
           <p:cNvSpPr txBox="1"/>
           <p:nvPr/>
         </p:nvSpPr>

--- a/skills/presentations/assets/pptx/examples/07-roadmap.pptx
+++ b/skills/presentations/assets/pptx/examples/07-roadmap.pptx
@@ -5,17 +5,18 @@
     <p:sldMasterId xmlns:r="http://schemas.openxmlformats.org/officeDocument/2006/relationships" id="2147483648" r:id="rId1"/>
   </p:sldMasterIdLst>
   <p:notesMasterIdLst>
-    <p:notesMasterId r:id="Rb6f4da648de94536"/>
+    <p:notesMasterId r:id="R4d1d4b6cd65b40f5"/>
   </p:notesMasterIdLst>
   <p:sldIdLst>
-    <p:sldId id="256" r:id="R440f5f35cd3c42a5"/>
-    <p:sldId id="257" r:id="R72e8d1844c644da7"/>
-    <p:sldId id="258" r:id="R507b470a60e04cd7"/>
-    <p:sldId id="259" r:id="R45a9dbe3f8c9482a"/>
-    <p:sldId id="260" r:id="R35a9f756ec334705"/>
-    <p:sldId id="261" r:id="Rb2e87db14ae7419c"/>
-    <p:sldId id="262" r:id="Re888220b8efe4432"/>
-    <p:sldId id="263" r:id="R6e2a7994989442e7"/>
+    <p:sldId id="256" r:id="R8f740db049ef404d"/>
+    <p:sldId id="257" r:id="R2401b0a4ff47451d"/>
+    <p:sldId id="258" r:id="R34d40912274d4949"/>
+    <p:sldId id="259" r:id="R9c8f67f48bc44d19"/>
+    <p:sldId id="260" r:id="Rbbb0412acfb04b61"/>
+    <p:sldId id="261" r:id="R71f68a267ad243a4"/>
+    <p:sldId id="262" r:id="R7060576de7a04893"/>
+    <p:sldId id="263" r:id="R226a9e7a8a094d45"/>
+    <p:sldId id="264" r:id="R978d1a82168b4e59"/>
   </p:sldIdLst>
   <p:sldSz cx="12192000" cy="6858000"/>
   <p:notesSz cx="6858000" cy="9144000"/>
@@ -624,7 +625,7 @@
           <a:p xmlns:a="http://schemas.openxmlformats.org/drawingml/2006/main">
             <a:r>
               <a:rPr lang="en-US"/>
-              <a:t>Endorsed map, not wishlist.</a:t>
+              <a:t>Agent/human: answer who/stakes/decision from this slide alone. Recommend=Endorse map; sample-first; revB AON in investment band; WiFi stretch. by 2026-06-12 roadmap review.</a:t>
             </a:r>
           </a:p>
         </p:txBody>
@@ -679,7 +680,7 @@
           <a:p xmlns:a="http://schemas.openxmlformats.org/drawingml/2006/main">
             <a:r>
               <a:rPr lang="en-US"/>
-              <a:t>Time-ordered themes.</a:t>
+              <a:t>Endorsed map, not wishlist.</a:t>
             </a:r>
           </a:p>
         </p:txBody>
@@ -734,7 +735,7 @@
           <a:p xmlns:a="http://schemas.openxmlformats.org/drawingml/2006/main">
             <a:r>
               <a:rPr lang="en-US"/>
-              <a:t>A only; HC already requested.</a:t>
+              <a:t>Time-ordered themes.</a:t>
             </a:r>
           </a:p>
         </p:txBody>
@@ -789,7 +790,7 @@
           <a:p xmlns:a="http://schemas.openxmlformats.org/drawingml/2006/main">
             <a:r>
               <a:rPr lang="en-US"/>
-              <a:t>Protect the map.</a:t>
+              <a:t>A only; HC already requested.</a:t>
             </a:r>
           </a:p>
         </p:txBody>
@@ -844,7 +845,7 @@
           <a:p xmlns:a="http://schemas.openxmlformats.org/drawingml/2006/main">
             <a:r>
               <a:rPr lang="en-US"/>
-              <a:t>Walk trade-offs; land recommendation.</a:t>
+              <a:t>Protect the map.</a:t>
             </a:r>
           </a:p>
         </p:txBody>
@@ -858,6 +859,61 @@
 </file>
 
 <file path=ppt/notesSlides/notesSlide8.xml><?xml version="1.0" encoding="utf-8"?>
+<p:notes xmlns:p="http://schemas.openxmlformats.org/presentationml/2006/main">
+  <p:cSld>
+    <p:spTree>
+      <p:nvGrpSpPr>
+        <p:cNvPr id="1" name=""/>
+        <p:cNvGrpSpPr/>
+        <p:nvPr/>
+      </p:nvGrpSpPr>
+      <p:grpSpPr>
+        <a:xfrm xmlns:a="http://schemas.openxmlformats.org/drawingml/2006/main"/>
+      </p:grpSpPr>
+      <p:sp>
+        <p:nvSpPr>
+          <p:cNvPr id="2" name="Slide Image Placeholder 1"/>
+          <p:cNvSpPr/>
+          <p:nvPr>
+            <p:ph type="sldImg" idx="0"/>
+          </p:nvPr>
+        </p:nvSpPr>
+        <p:spPr/>
+        <p:txBody>
+          <a:bodyPr xmlns:a="http://schemas.openxmlformats.org/drawingml/2006/main"/>
+          <a:lstStyle xmlns:a="http://schemas.openxmlformats.org/drawingml/2006/main"/>
+          <a:p xmlns:a="http://schemas.openxmlformats.org/drawingml/2006/main"/>
+        </p:txBody>
+      </p:sp>
+      <p:sp>
+        <p:nvSpPr>
+          <p:cNvPr id="3" name="Notes Placeholder 2"/>
+          <p:cNvSpPr/>
+          <p:nvPr>
+            <p:ph type="body" idx="1"/>
+          </p:nvPr>
+        </p:nvSpPr>
+        <p:spPr/>
+        <p:txBody>
+          <a:bodyPr xmlns:a="http://schemas.openxmlformats.org/drawingml/2006/main"/>
+          <a:lstStyle xmlns:a="http://schemas.openxmlformats.org/drawingml/2006/main"/>
+          <a:p xmlns:a="http://schemas.openxmlformats.org/drawingml/2006/main">
+            <a:r>
+              <a:rPr lang="en-US"/>
+              <a:t>Walk trade-offs; land recommendation.</a:t>
+            </a:r>
+          </a:p>
+        </p:txBody>
+      </p:sp>
+    </p:spTree>
+  </p:cSld>
+  <p:clrMapOvr>
+    <a:masterClrMapping xmlns:a="http://schemas.openxmlformats.org/drawingml/2006/main"/>
+  </p:clrMapOvr>
+</p:notes>
+</file>
+
+<file path=ppt/notesSlides/notesSlide9.xml><?xml version="1.0" encoding="utf-8"?>
 <p:notes xmlns:p="http://schemas.openxmlformats.org/presentationml/2006/main">
   <p:cSld>
     <p:spTree>
@@ -1659,6 +1715,387 @@
 
 <file path=ppt/slides/slide3.xml><?xml version="1.0" encoding="utf-8"?>
 <p:sld xmlns:p="http://schemas.openxmlformats.org/presentationml/2006/main">
+  <p:cSld name="Situation &amp; decision card">
+    <p:bg>
+      <p:bgPr>
+        <a:solidFill xmlns:a="http://schemas.openxmlformats.org/drawingml/2006/main">
+          <a:srgbClr val="F4F7FC"/>
+        </a:solidFill>
+      </p:bgPr>
+    </p:bg>
+    <p:spTree>
+      <p:nvGrpSpPr>
+        <p:cNvPr id="1" name=""/>
+        <p:cNvGrpSpPr/>
+        <p:nvPr/>
+      </p:nvGrpSpPr>
+      <p:grpSpPr/>
+      <p:sp>
+        <p:nvSpPr>
+          <p:cNvPr id="100009" name="TextBox 1"/>
+          <p:cNvSpPr txBox="1"/>
+          <p:nvPr/>
+        </p:nvSpPr>
+        <p:spPr>
+          <a:xfrm xmlns:a="http://schemas.openxmlformats.org/drawingml/2006/main">
+            <a:off x="504000" y="270000"/>
+            <a:ext cx="11088000" cy="270000"/>
+          </a:xfrm>
+          <a:prstGeom xmlns:a="http://schemas.openxmlformats.org/drawingml/2006/main" prst="rect">
+            <a:avLst/>
+          </a:prstGeom>
+        </p:spPr>
+        <p:txBody>
+          <a:bodyPr xmlns:a="http://schemas.openxmlformats.org/drawingml/2006/main"/>
+          <a:lstStyle xmlns:a="http://schemas.openxmlformats.org/drawingml/2006/main"/>
+          <a:p xmlns:a="http://schemas.openxmlformats.org/drawingml/2006/main">
+            <a:r>
+              <a:rPr lang="en-US" sz="1100" b="1">
+                <a:solidFill>
+                  <a:srgbClr val="2B6CB0"/>
+                </a:solidFill>
+                <a:latin typeface="Calibri"/>
+                <a:ea typeface="Calibri"/>
+              </a:rPr>
+              <a:t>READ THIS BEFORE THE DETAILS</a:t>
+            </a:r>
+          </a:p>
+        </p:txBody>
+      </p:sp>
+      <p:sp>
+        <p:nvSpPr>
+          <p:cNvPr id="100010" name="TextBox 2"/>
+          <p:cNvSpPr txBox="1"/>
+          <p:nvPr/>
+        </p:nvSpPr>
+        <p:spPr>
+          <a:xfrm xmlns:a="http://schemas.openxmlformats.org/drawingml/2006/main">
+            <a:off x="504000" y="558000"/>
+            <a:ext cx="11088000" cy="612000"/>
+          </a:xfrm>
+          <a:prstGeom xmlns:a="http://schemas.openxmlformats.org/drawingml/2006/main" prst="rect">
+            <a:avLst/>
+          </a:prstGeom>
+        </p:spPr>
+        <p:txBody>
+          <a:bodyPr xmlns:a="http://schemas.openxmlformats.org/drawingml/2006/main"/>
+          <a:lstStyle xmlns:a="http://schemas.openxmlformats.org/drawingml/2006/main"/>
+          <a:p xmlns:a="http://schemas.openxmlformats.org/drawingml/2006/main">
+            <a:r>
+              <a:rPr lang="en-US" sz="2800" b="1">
+                <a:solidFill>
+                  <a:srgbClr val="1A202C"/>
+                </a:solidFill>
+                <a:latin typeface="Calibri"/>
+                <a:ea typeface="Calibri"/>
+              </a:rPr>
+              <a:t>Situation &amp; decision card</a:t>
+            </a:r>
+          </a:p>
+        </p:txBody>
+      </p:sp>
+      <p:sp>
+        <p:nvSpPr>
+          <p:cNvPr id="100011" name="TextBox 3"/>
+          <p:cNvSpPr txBox="1"/>
+          <p:nvPr/>
+        </p:nvSpPr>
+        <p:spPr>
+          <a:xfrm xmlns:a="http://schemas.openxmlformats.org/drawingml/2006/main">
+            <a:off x="504000" y="1224000"/>
+            <a:ext cx="11088000" cy="4968000"/>
+          </a:xfrm>
+          <a:prstGeom xmlns:a="http://schemas.openxmlformats.org/drawingml/2006/main" prst="rect">
+            <a:avLst/>
+          </a:prstGeom>
+          <a:solidFill xmlns:a="http://schemas.openxmlformats.org/drawingml/2006/main">
+            <a:srgbClr val="FFFFFF"/>
+          </a:solidFill>
+        </p:spPr>
+        <p:txBody>
+          <a:bodyPr xmlns:a="http://schemas.openxmlformats.org/drawingml/2006/main"/>
+          <a:lstStyle xmlns:a="http://schemas.openxmlformats.org/drawingml/2006/main"/>
+          <a:p xmlns:a="http://schemas.openxmlformats.org/drawingml/2006/main">
+            <a:r>
+              <a:rPr lang="en-US" sz="1300" b="0">
+                <a:solidFill>
+                  <a:srgbClr val="1A202C"/>
+                </a:solidFill>
+                <a:latin typeface="Calibri"/>
+                <a:ea typeface="Calibri"/>
+              </a:rPr>
+              <a:t>Presenter: Alex Chen — EM + program PM</a:t>
+            </a:r>
+          </a:p>
+          <a:p xmlns:a="http://schemas.openxmlformats.org/drawingml/2006/main">
+            <a:r>
+              <a:rPr lang="en-US" sz="1300" b="0">
+                <a:solidFill>
+                  <a:srgbClr val="1A202C"/>
+                </a:solidFill>
+                <a:latin typeface="Calibri"/>
+                <a:ea typeface="Calibri"/>
+              </a:rPr>
+              <a:t>Decision-maker: Morgan Lee + steering (endorse map + priority rule)</a:t>
+            </a:r>
+          </a:p>
+          <a:p xmlns:a="http://schemas.openxmlformats.org/drawingml/2006/main">
+            <a:r>
+              <a:rPr lang="en-US" sz="1300" b="0">
+                <a:solidFill>
+                  <a:srgbClr val="1A202C"/>
+                </a:solidFill>
+                <a:latin typeface="Calibri"/>
+                <a:ea typeface="Calibri"/>
+              </a:rPr>
+              <a:t>Audience: Steering: eng, PM, IP/package partners</a:t>
+            </a:r>
+          </a:p>
+          <a:p xmlns:a="http://schemas.openxmlformats.org/drawingml/2006/main">
+            <a:r>
+              <a:rPr lang="en-US" sz="1300" b="0">
+                <a:solidFill>
+                  <a:srgbClr val="1A202C"/>
+                </a:solidFill>
+                <a:latin typeface="Calibri"/>
+                <a:ea typeface="Calibri"/>
+              </a:rPr>
+              <a:t/>
+            </a:r>
+          </a:p>
+          <a:p xmlns:a="http://schemas.openxmlformats.org/drawingml/2006/main">
+            <a:r>
+              <a:rPr lang="en-US" sz="1300" b="0">
+                <a:solidFill>
+                  <a:srgbClr val="1A202C"/>
+                </a:solidFill>
+                <a:latin typeface="Calibri"/>
+                <a:ea typeface="Calibri"/>
+              </a:rPr>
+              <a:t>What just happened / context:</a:t>
+            </a:r>
+          </a:p>
+          <a:p xmlns:a="http://schemas.openxmlformats.org/drawingml/2006/main">
+            <a:r>
+              <a:rPr lang="en-US" sz="1300" b="0">
+                <a:solidFill>
+                  <a:srgbClr val="1A202C"/>
+                </a:solidFill>
+                <a:latin typeface="Calibri"/>
+                <a:ea typeface="Calibri"/>
+              </a:rPr>
+              <a:t>H1 delivered freeze, silicon, sample path. H2 must choose: sample support vs early WiFi IP integrate if capacity conflicts. RevB dual-mux AON still owed from Option B residual.</a:t>
+            </a:r>
+          </a:p>
+          <a:p xmlns:a="http://schemas.openxmlformats.org/drawingml/2006/main">
+            <a:r>
+              <a:rPr lang="en-US" sz="1300" b="0">
+                <a:solidFill>
+                  <a:srgbClr val="1A202C"/>
+                </a:solidFill>
+                <a:latin typeface="Calibri"/>
+                <a:ea typeface="Calibri"/>
+              </a:rPr>
+              <a:t/>
+            </a:r>
+          </a:p>
+          <a:p xmlns:a="http://schemas.openxmlformats.org/drawingml/2006/main">
+            <a:r>
+              <a:rPr lang="en-US" sz="1300" b="0">
+                <a:solidFill>
+                  <a:srgbClr val="1A202C"/>
+                </a:solidFill>
+                <a:latin typeface="Calibri"/>
+                <a:ea typeface="Calibri"/>
+              </a:rPr>
+              <a:t>Stakes if we get this wrong:</a:t>
+            </a:r>
+          </a:p>
+          <a:p xmlns:a="http://schemas.openxmlformats.org/drawingml/2006/main">
+            <a:r>
+              <a:rPr lang="en-US" sz="1300" b="0">
+                <a:solidFill>
+                  <a:srgbClr val="1A202C"/>
+                </a:solidFill>
+                <a:latin typeface="Calibri"/>
+                <a:ea typeface="Calibri"/>
+              </a:rPr>
+              <a:t>Without an explicit priority rule, partner teams will dual-commit Atlas and break sample SLA.</a:t>
+            </a:r>
+          </a:p>
+          <a:p xmlns:a="http://schemas.openxmlformats.org/drawingml/2006/main">
+            <a:r>
+              <a:rPr lang="en-US" sz="1300" b="0">
+                <a:solidFill>
+                  <a:srgbClr val="1A202C"/>
+                </a:solidFill>
+                <a:latin typeface="Calibri"/>
+                <a:ea typeface="Calibri"/>
+              </a:rPr>
+              <a:t/>
+            </a:r>
+          </a:p>
+          <a:p xmlns:a="http://schemas.openxmlformats.org/drawingml/2006/main">
+            <a:r>
+              <a:rPr lang="en-US" sz="1300" b="0">
+                <a:solidFill>
+                  <a:srgbClr val="1A202C"/>
+                </a:solidFill>
+                <a:latin typeface="Calibri"/>
+                <a:ea typeface="Calibri"/>
+              </a:rPr>
+              <a:t>Decision needed:</a:t>
+            </a:r>
+          </a:p>
+          <a:p xmlns:a="http://schemas.openxmlformats.org/drawingml/2006/main">
+            <a:r>
+              <a:rPr lang="en-US" sz="1300" b="0">
+                <a:solidFill>
+                  <a:srgbClr val="1A202C"/>
+                </a:solidFill>
+                <a:latin typeface="Calibri"/>
+                <a:ea typeface="Calibri"/>
+              </a:rPr>
+              <a:t>Endorse H2 themes; confirm default sample &gt; WiFi on conflict.</a:t>
+            </a:r>
+          </a:p>
+          <a:p xmlns:a="http://schemas.openxmlformats.org/drawingml/2006/main">
+            <a:r>
+              <a:rPr lang="en-US" sz="1300" b="0">
+                <a:solidFill>
+                  <a:srgbClr val="1A202C"/>
+                </a:solidFill>
+                <a:latin typeface="Calibri"/>
+                <a:ea typeface="Calibri"/>
+              </a:rPr>
+              <a:t/>
+            </a:r>
+          </a:p>
+          <a:p xmlns:a="http://schemas.openxmlformats.org/drawingml/2006/main">
+            <a:r>
+              <a:rPr lang="en-US" sz="1300" b="0">
+                <a:solidFill>
+                  <a:srgbClr val="1A202C"/>
+                </a:solidFill>
+                <a:latin typeface="Calibri"/>
+                <a:ea typeface="Calibri"/>
+              </a:rPr>
+              <a:t>Recommendation: Endorse map; sample-first; revB AON in investment band; WiFi stretch.</a:t>
+            </a:r>
+          </a:p>
+          <a:p xmlns:a="http://schemas.openxmlformats.org/drawingml/2006/main">
+            <a:r>
+              <a:rPr lang="en-US" sz="1300" b="0">
+                <a:solidFill>
+                  <a:srgbClr val="1A202C"/>
+                </a:solidFill>
+                <a:latin typeface="Calibri"/>
+                <a:ea typeface="Calibri"/>
+              </a:rPr>
+              <a:t>If YES: Intake rule enforceable; partners plan against the same not-doing list.</a:t>
+            </a:r>
+          </a:p>
+          <a:p xmlns:a="http://schemas.openxmlformats.org/drawingml/2006/main">
+            <a:r>
+              <a:rPr lang="en-US" sz="1300" b="0">
+                <a:solidFill>
+                  <a:srgbClr val="1A202C"/>
+                </a:solidFill>
+                <a:latin typeface="Calibri"/>
+                <a:ea typeface="Calibri"/>
+              </a:rPr>
+              <a:t>If NO / delay: Hallway commits return; sample and WiFi thrash.</a:t>
+            </a:r>
+          </a:p>
+          <a:p xmlns:a="http://schemas.openxmlformats.org/drawingml/2006/main">
+            <a:r>
+              <a:rPr lang="en-US" sz="1300" b="0">
+                <a:solidFill>
+                  <a:srgbClr val="1A202C"/>
+                </a:solidFill>
+                <a:latin typeface="Calibri"/>
+                <a:ea typeface="Calibri"/>
+              </a:rPr>
+              <a:t/>
+            </a:r>
+          </a:p>
+          <a:p xmlns:a="http://schemas.openxmlformats.org/drawingml/2006/main">
+            <a:r>
+              <a:rPr lang="en-US" sz="1300" b="0">
+                <a:solidFill>
+                  <a:srgbClr val="1A202C"/>
+                </a:solidFill>
+                <a:latin typeface="Calibri"/>
+                <a:ea typeface="Calibri"/>
+              </a:rPr>
+              <a:t>Decide by: 2026-06-12 roadmap review</a:t>
+            </a:r>
+          </a:p>
+          <a:p xmlns:a="http://schemas.openxmlformats.org/drawingml/2006/main">
+            <a:r>
+              <a:rPr lang="en-US" sz="1300" b="0">
+                <a:solidFill>
+                  <a:srgbClr val="1A202C"/>
+                </a:solidFill>
+                <a:latin typeface="Calibri"/>
+                <a:ea typeface="Calibri"/>
+              </a:rPr>
+              <a:t>Arc prior: 01 residual revB · 02 sample · 04/05 farm/seats · 06 hire</a:t>
+            </a:r>
+          </a:p>
+          <a:p xmlns:a="http://schemas.openxmlformats.org/drawingml/2006/main">
+            <a:r>
+              <a:rPr lang="en-US" sz="1300" b="0">
+                <a:solidFill>
+                  <a:srgbClr val="1A202C"/>
+                </a:solidFill>
+                <a:latin typeface="Calibri"/>
+                <a:ea typeface="Calibri"/>
+              </a:rPr>
+              <a:t>Arc next: 08 Q3 commit locks this map into period plan</a:t>
+            </a:r>
+          </a:p>
+        </p:txBody>
+      </p:sp>
+      <p:sp>
+        <p:nvSpPr>
+          <p:cNvPr id="100012" name="TextBox 4"/>
+          <p:cNvSpPr txBox="1"/>
+          <p:nvPr/>
+        </p:nvSpPr>
+        <p:spPr>
+          <a:xfrm xmlns:a="http://schemas.openxmlformats.org/drawingml/2006/main">
+            <a:off x="504000" y="6426000"/>
+            <a:ext cx="11088000" cy="306000"/>
+          </a:xfrm>
+          <a:prstGeom xmlns:a="http://schemas.openxmlformats.org/drawingml/2006/main" prst="rect">
+            <a:avLst/>
+          </a:prstGeom>
+        </p:spPr>
+        <p:txBody>
+          <a:bodyPr xmlns:a="http://schemas.openxmlformats.org/drawingml/2006/main"/>
+          <a:lstStyle xmlns:a="http://schemas.openxmlformats.org/drawingml/2006/main"/>
+          <a:p xmlns:a="http://schemas.openxmlformats.org/drawingml/2006/main">
+            <a:r>
+              <a:rPr lang="en-US" sz="1100" b="0">
+                <a:solidFill>
+                  <a:srgbClr val="718096"/>
+                </a:solidFill>
+                <a:latin typeface="Calibri"/>
+                <a:ea typeface="Calibri"/>
+              </a:rPr>
+              <a:t>Atlas Platform  ·  Project Aurora  ·  NovaSemi  ·  2026</a:t>
+            </a:r>
+          </a:p>
+        </p:txBody>
+      </p:sp>
+    </p:spTree>
+  </p:cSld>
+</p:sld>
+</file>
+
+<file path=ppt/slides/slide4.xml><?xml version="1.0" encoding="utf-8"?>
+<p:sld xmlns:p="http://schemas.openxmlformats.org/presentationml/2006/main">
   <p:cSld name="BLUF — endorse H2 themes; pick sample vs WiFi priority">
     <p:bg>
       <p:bgPr>
@@ -1676,7 +2113,7 @@
       <p:grpSpPr/>
       <p:sp>
         <p:nvSpPr>
-          <p:cNvPr id="100009" name="TextBox 1"/>
+          <p:cNvPr id="100013" name="TextBox 1"/>
           <p:cNvSpPr txBox="1"/>
           <p:nvPr/>
         </p:nvSpPr>
@@ -1708,7 +2145,7 @@
       </p:sp>
       <p:sp>
         <p:nvSpPr>
-          <p:cNvPr id="100010" name="TextBox 2"/>
+          <p:cNvPr id="100014" name="TextBox 2"/>
           <p:cNvSpPr txBox="1"/>
           <p:nvPr/>
         </p:nvSpPr>
@@ -1740,7 +2177,7 @@
       </p:sp>
       <p:sp>
         <p:nvSpPr>
-          <p:cNvPr id="100011" name="TextBox 3"/>
+          <p:cNvPr id="100015" name="TextBox 3"/>
           <p:cNvSpPr txBox="1"/>
           <p:nvPr/>
         </p:nvSpPr>
@@ -1775,7 +2212,7 @@
       </p:sp>
       <p:sp>
         <p:nvSpPr>
-          <p:cNvPr id="100012" name="TextBox 4"/>
+          <p:cNvPr id="100016" name="TextBox 4"/>
           <p:cNvSpPr txBox="1"/>
           <p:nvPr/>
         </p:nvSpPr>
@@ -1858,7 +2295,7 @@
       </p:sp>
       <p:sp>
         <p:nvSpPr>
-          <p:cNvPr id="100013" name="TextBox 5"/>
+          <p:cNvPr id="100017" name="TextBox 5"/>
           <p:cNvSpPr txBox="1"/>
           <p:nvPr/>
         </p:nvSpPr>
@@ -1893,7 +2330,7 @@
 </p:sld>
 </file>
 
-<file path=ppt/slides/slide4.xml><?xml version="1.0" encoding="utf-8"?>
+<file path=ppt/slides/slide5.xml><?xml version="1.0" encoding="utf-8"?>
 <p:sld xmlns:p="http://schemas.openxmlformats.org/presentationml/2006/main">
   <p:cSld name="Now / Next / Later">
     <p:bg>
@@ -1912,7 +2349,7 @@
       <p:grpSpPr/>
       <p:sp>
         <p:nvSpPr>
-          <p:cNvPr id="100014" name="TextBox 1"/>
+          <p:cNvPr id="100018" name="TextBox 1"/>
           <p:cNvSpPr txBox="1"/>
           <p:nvPr/>
         </p:nvSpPr>
@@ -1944,7 +2381,7 @@
       </p:sp>
       <p:sp>
         <p:nvSpPr>
-          <p:cNvPr id="100015" name="TextBox 2"/>
+          <p:cNvPr id="100019" name="TextBox 2"/>
           <p:cNvSpPr txBox="1"/>
           <p:nvPr/>
         </p:nvSpPr>
@@ -2039,7 +2476,7 @@
       </p:sp>
       <p:sp>
         <p:nvSpPr>
-          <p:cNvPr id="100016" name="TextBox 3"/>
+          <p:cNvPr id="100020" name="TextBox 3"/>
           <p:cNvSpPr txBox="1"/>
           <p:nvPr/>
         </p:nvSpPr>
@@ -2074,7 +2511,7 @@
 </p:sld>
 </file>
 
-<file path=ppt/slides/slide5.xml><?xml version="1.0" encoding="utf-8"?>
+<file path=ppt/slides/slide6.xml><?xml version="1.0" encoding="utf-8"?>
 <p:sld xmlns:p="http://schemas.openxmlformats.org/presentationml/2006/main">
   <p:cSld name="Capacity &amp; assumptions (A)">
     <p:bg>
@@ -2093,7 +2530,7 @@
       <p:grpSpPr/>
       <p:sp>
         <p:nvSpPr>
-          <p:cNvPr id="100017" name="TextBox 1"/>
+          <p:cNvPr id="100021" name="TextBox 1"/>
           <p:cNvSpPr txBox="1"/>
           <p:nvPr/>
         </p:nvSpPr>
@@ -2125,7 +2562,7 @@
       </p:sp>
       <p:sp>
         <p:nvSpPr>
-          <p:cNvPr id="100018" name="TextBox 2"/>
+          <p:cNvPr id="100022" name="TextBox 2"/>
           <p:cNvSpPr txBox="1"/>
           <p:nvPr/>
         </p:nvSpPr>
@@ -2220,7 +2657,7 @@
       </p:sp>
       <p:sp>
         <p:nvSpPr>
-          <p:cNvPr id="100019" name="TextBox 3"/>
+          <p:cNvPr id="100023" name="TextBox 3"/>
           <p:cNvSpPr txBox="1"/>
           <p:nvPr/>
         </p:nvSpPr>
@@ -2255,7 +2692,7 @@
 </p:sld>
 </file>
 
-<file path=ppt/slides/slide6.xml><?xml version="1.0" encoding="utf-8"?>
+<file path=ppt/slides/slide7.xml><?xml version="1.0" encoding="utf-8"?>
 <p:sld xmlns:p="http://schemas.openxmlformats.org/presentationml/2006/main">
   <p:cSld name="Intake rule">
     <p:bg>
@@ -2274,7 +2711,7 @@
       <p:grpSpPr/>
       <p:sp>
         <p:nvSpPr>
-          <p:cNvPr id="100020" name="TextBox 1"/>
+          <p:cNvPr id="100024" name="TextBox 1"/>
           <p:cNvSpPr txBox="1"/>
           <p:nvPr/>
         </p:nvSpPr>
@@ -2306,7 +2743,7 @@
       </p:sp>
       <p:sp>
         <p:nvSpPr>
-          <p:cNvPr id="100021" name="TextBox 2"/>
+          <p:cNvPr id="100025" name="TextBox 2"/>
           <p:cNvSpPr txBox="1"/>
           <p:nvPr/>
         </p:nvSpPr>
@@ -2377,7 +2814,7 @@
       </p:sp>
       <p:sp>
         <p:nvSpPr>
-          <p:cNvPr id="100022" name="TextBox 3"/>
+          <p:cNvPr id="100026" name="TextBox 3"/>
           <p:cNvSpPr txBox="1"/>
           <p:nvPr/>
         </p:nvSpPr>
@@ -2412,7 +2849,7 @@
 </p:sld>
 </file>
 
-<file path=ppt/slides/slide7.xml><?xml version="1.0" encoding="utf-8"?>
+<file path=ppt/slides/slide8.xml><?xml version="1.0" encoding="utf-8"?>
 <p:sld xmlns:p="http://schemas.openxmlformats.org/presentationml/2006/main">
   <p:cSld name="Options &amp; recommendation">
     <p:bg>
@@ -2431,7 +2868,7 @@
       <p:grpSpPr/>
       <p:sp>
         <p:nvSpPr>
-          <p:cNvPr id="100023" name="TextBox 1"/>
+          <p:cNvPr id="100027" name="TextBox 1"/>
           <p:cNvSpPr txBox="1"/>
           <p:nvPr/>
         </p:nvSpPr>
@@ -2463,7 +2900,7 @@
       </p:sp>
       <p:sp>
         <p:nvSpPr>
-          <p:cNvPr id="100024" name="TextBox 2"/>
+          <p:cNvPr id="100028" name="TextBox 2"/>
           <p:cNvSpPr txBox="1"/>
           <p:nvPr/>
         </p:nvSpPr>
@@ -2495,7 +2932,7 @@
       </p:sp>
       <p:graphicFrame>
         <p:nvGraphicFramePr>
-          <p:cNvPr id="100025" name="Table 1"/>
+          <p:cNvPr id="100029" name="Table 1"/>
           <p:cNvGraphicFramePr/>
           <p:nvPr/>
         </p:nvGraphicFramePr>
@@ -2801,7 +3238,7 @@
       </p:graphicFrame>
       <p:sp>
         <p:nvSpPr>
-          <p:cNvPr id="100026" name="TextBox 3"/>
+          <p:cNvPr id="100030" name="TextBox 3"/>
           <p:cNvSpPr txBox="1"/>
           <p:nvPr/>
         </p:nvSpPr>
@@ -2836,7 +3273,7 @@
 </p:sld>
 </file>
 
-<file path=ppt/slides/slide8.xml><?xml version="1.0" encoding="utf-8"?>
+<file path=ppt/slides/slide9.xml><?xml version="1.0" encoding="utf-8"?>
 <p:sld xmlns:p="http://schemas.openxmlformats.org/presentationml/2006/main">
   <p:cSld name="Decision &amp; ask">
     <p:bg>
@@ -2855,7 +3292,7 @@
       <p:grpSpPr/>
       <p:sp>
         <p:nvSpPr>
-          <p:cNvPr id="100027" name="TextBox 1"/>
+          <p:cNvPr id="100031" name="TextBox 1"/>
           <p:cNvSpPr txBox="1"/>
           <p:nvPr/>
         </p:nvSpPr>
@@ -2887,7 +3324,7 @@
       </p:sp>
       <p:sp>
         <p:nvSpPr>
-          <p:cNvPr id="100028" name="TextBox 2"/>
+          <p:cNvPr id="100032" name="TextBox 2"/>
           <p:cNvSpPr txBox="1"/>
           <p:nvPr/>
         </p:nvSpPr>
@@ -2919,7 +3356,7 @@
       </p:sp>
       <p:sp>
         <p:nvSpPr>
-          <p:cNvPr id="100029" name="TextBox 3"/>
+          <p:cNvPr id="100033" name="TextBox 3"/>
           <p:cNvSpPr txBox="1"/>
           <p:nvPr/>
         </p:nvSpPr>
@@ -2978,7 +3415,7 @@
       </p:sp>
       <p:sp>
         <p:nvSpPr>
-          <p:cNvPr id="100030" name="TextBox 4"/>
+          <p:cNvPr id="100034" name="TextBox 4"/>
           <p:cNvSpPr txBox="1"/>
           <p:nvPr/>
         </p:nvSpPr>

--- a/skills/presentations/assets/pptx/examples/07-roadmap.pptx
+++ b/skills/presentations/assets/pptx/examples/07-roadmap.pptx
@@ -5,18 +5,18 @@
     <p:sldMasterId xmlns:r="http://schemas.openxmlformats.org/officeDocument/2006/relationships" id="2147483648" r:id="rId1"/>
   </p:sldMasterIdLst>
   <p:notesMasterIdLst>
-    <p:notesMasterId r:id="R4d1d4b6cd65b40f5"/>
+    <p:notesMasterId r:id="Rdeb28b9b12fe4d8c"/>
   </p:notesMasterIdLst>
   <p:sldIdLst>
-    <p:sldId id="256" r:id="R8f740db049ef404d"/>
-    <p:sldId id="257" r:id="R2401b0a4ff47451d"/>
-    <p:sldId id="258" r:id="R34d40912274d4949"/>
-    <p:sldId id="259" r:id="R9c8f67f48bc44d19"/>
-    <p:sldId id="260" r:id="Rbbb0412acfb04b61"/>
-    <p:sldId id="261" r:id="R71f68a267ad243a4"/>
-    <p:sldId id="262" r:id="R7060576de7a04893"/>
-    <p:sldId id="263" r:id="R226a9e7a8a094d45"/>
-    <p:sldId id="264" r:id="R978d1a82168b4e59"/>
+    <p:sldId id="256" r:id="Re2328afac08f4160"/>
+    <p:sldId id="257" r:id="Rc58940b11e88497a"/>
+    <p:sldId id="258" r:id="R9d85f568ccf6437e"/>
+    <p:sldId id="259" r:id="R6a461b04d67f427d"/>
+    <p:sldId id="260" r:id="R800371ff9d214185"/>
+    <p:sldId id="261" r:id="R3021e436b6a64d1e"/>
+    <p:sldId id="262" r:id="R7ed5ef404fe64f17"/>
+    <p:sldId id="263" r:id="Rde0986ba41a84d9e"/>
+    <p:sldId id="264" r:id="R2fae0bc49f7048ca"/>
   </p:sldIdLst>
   <p:sldSz cx="12192000" cy="6858000"/>
   <p:notesSz cx="6858000" cy="9144000"/>
@@ -2052,7 +2052,7 @@
                 <a:latin typeface="Calibri"/>
                 <a:ea typeface="Calibri"/>
               </a:rPr>
-              <a:t>Arc next: 08 Q3 commit locks this map into period plan</a:t>
+              <a:t>Arc next: 09 Q2 QBR (6/26) then 08 Q3 commit locks this map</a:t>
             </a:r>
           </a:p>
         </p:txBody>

--- a/skills/presentations/assets/pptx/examples/07-roadmap.pptx
+++ b/skills/presentations/assets/pptx/examples/07-roadmap.pptx
@@ -5,18 +5,18 @@
     <p:sldMasterId xmlns:r="http://schemas.openxmlformats.org/officeDocument/2006/relationships" id="2147483648" r:id="rId1"/>
   </p:sldMasterIdLst>
   <p:notesMasterIdLst>
-    <p:notesMasterId r:id="Rdeb28b9b12fe4d8c"/>
+    <p:notesMasterId r:id="R38da802e5bf14b86"/>
   </p:notesMasterIdLst>
   <p:sldIdLst>
-    <p:sldId id="256" r:id="Re2328afac08f4160"/>
-    <p:sldId id="257" r:id="Rc58940b11e88497a"/>
-    <p:sldId id="258" r:id="R9d85f568ccf6437e"/>
-    <p:sldId id="259" r:id="R6a461b04d67f427d"/>
-    <p:sldId id="260" r:id="R800371ff9d214185"/>
-    <p:sldId id="261" r:id="R3021e436b6a64d1e"/>
-    <p:sldId id="262" r:id="R7ed5ef404fe64f17"/>
-    <p:sldId id="263" r:id="Rde0986ba41a84d9e"/>
-    <p:sldId id="264" r:id="R2fae0bc49f7048ca"/>
+    <p:sldId id="256" r:id="R8f6304d3b1164696"/>
+    <p:sldId id="257" r:id="R905cd838e93c4827"/>
+    <p:sldId id="258" r:id="Ra3a45459247e451a"/>
+    <p:sldId id="259" r:id="R7bcf46b3abae481a"/>
+    <p:sldId id="260" r:id="R99a1349949f34742"/>
+    <p:sldId id="261" r:id="Ree946842fb7c48eb"/>
+    <p:sldId id="262" r:id="Rd3e5d8b2ba384800"/>
+    <p:sldId id="263" r:id="Rbbd4c9c61969448a"/>
+    <p:sldId id="264" r:id="R23c1f2f248b248c1"/>
   </p:sldIdLst>
   <p:sldSz cx="12192000" cy="6858000"/>
   <p:notesSz cx="6858000" cy="9144000"/>
@@ -1671,7 +1671,19 @@
                 <a:latin typeface="Calibri"/>
                 <a:ea typeface="Calibri"/>
               </a:rPr>
-              <a:t>In-repo: skills/presentations/classic-public-cases.md</a:t>
+              <a:t>CONTENT TEMPLATE ONLY — do not copy visual design (colors, margins, fonts) as a brand system.</a:t>
+            </a:r>
+          </a:p>
+          <a:p xmlns:a="http://schemas.openxmlformats.org/drawingml/2006/main">
+            <a:r>
+              <a:rPr lang="en-US" sz="1500" b="0">
+                <a:solidFill>
+                  <a:srgbClr val="1A202C"/>
+                </a:solidFill>
+                <a:latin typeface="Calibri"/>
+                <a:ea typeface="Calibri"/>
+              </a:rPr>
+              <a:t>In-repo: skills/presentations/classic-public-cases.md · assets/README.md (agent notice)</a:t>
             </a:r>
           </a:p>
         </p:txBody>
